--- a/dist/초3/수학/자연수계산/초3_수학_자연수계산_03_나눗셈의뜻_학생용.pptx
+++ b/dist/초3/수학/자연수계산/초3_수학_자연수계산_03_나눗셈의뜻_학생용.pptx
@@ -120,13 +120,13 @@
   <p:extLst>
     <p:ext uri="{521415D9-36F7-43E2-AB2F-B90AF26B5E84}">
       <p14:sectionLst xmlns:p14="http://schemas.microsoft.com/office/powerpoint/2010/main">
-        <p14:section name="도입" id="{b8998829-6111-06c3-26c3-0a945f1163d5}">
+        <p14:section name="도입" id="{8565c1c8-bae9-6f2d-a30d-2adfca4abc5a}">
           <p14:sldIdLst>
             <p14:sldId id="256"/>
             <p14:sldId id="257"/>
           </p14:sldIdLst>
         </p14:section>
-        <p14:section name="개념" id="{9b271f6e-282a-8ff8-4c14-20c65688988a}">
+        <p14:section name="개념" id="{c20c1b98-bd3f-ba04-3f9f-99bc0429722b}">
           <p14:sldIdLst>
             <p14:sldId id="258"/>
             <p14:sldId id="259"/>
@@ -135,31 +135,31 @@
             <p14:sldId id="264"/>
           </p14:sldIdLst>
         </p14:section>
-        <p14:section name="연습" id="{51105c95-9707-6bc5-d8e9-41a236c0dee6}">
+        <p14:section name="연습" id="{de400e61-2ad7-4fde-6726-84b95a1cf22a}">
           <p14:sldIdLst>
             <p14:sldId id="262"/>
             <p14:sldId id="263"/>
             <p14:sldId id="265"/>
           </p14:sldIdLst>
         </p14:section>
-        <p14:section name="개념" id="{38d7290f-c5cb-7c99-c719-dbf8ac70cb20}">
+        <p14:section name="개념" id="{93925de8-e400-e989-91ac-5e686d68a6fd}">
           <p14:sldIdLst/>
         </p14:section>
-        <p14:section name="연습" id="{647b95af-9683-879d-136e-d1614362671b}">
+        <p14:section name="연습" id="{4837c1e5-f452-fc01-98c1-f654395a80f4}">
           <p14:sldIdLst/>
         </p14:section>
-        <p14:section name="확인" id="{40a672ac-1afa-cf31-10e1-0839edb8c2f8}">
+        <p14:section name="확인" id="{1a8c1dae-f508-578a-f198-ce2929c52758}">
           <p14:sldIdLst>
             <p14:sldId id="266"/>
             <p14:sldId id="267"/>
           </p14:sldIdLst>
         </p14:section>
-        <p14:section name="정리" id="{567edb8e-aa26-bfc0-1998-449043e25b48}">
+        <p14:section name="정리" id="{26c827e2-addb-2eaa-fab7-1a62aa35808e}">
           <p14:sldIdLst>
             <p14:sldId id="268"/>
           </p14:sldIdLst>
         </p14:section>
-        <p14:section name="보충" id="{d9e25506-d4c4-f571-307b-3778fd3c437e}">
+        <p14:section name="보충" id="{8b81da1a-8494-f747-4aa2-a2f8ab82d5eb}">
           <p14:sldIdLst>
             <p14:sldId id="269"/>
           </p14:sldIdLst>

--- a/dist/초3/수학/자연수계산/초3_수학_자연수계산_03_나눗셈의뜻_학생용.pptx
+++ b/dist/초3/수학/자연수계산/초3_수학_자연수계산_03_나눗셈의뜻_학생용.pptx
@@ -120,13 +120,13 @@
   <p:extLst>
     <p:ext uri="{521415D9-36F7-43E2-AB2F-B90AF26B5E84}">
       <p14:sectionLst xmlns:p14="http://schemas.microsoft.com/office/powerpoint/2010/main">
-        <p14:section name="도입" id="{8565c1c8-bae9-6f2d-a30d-2adfca4abc5a}">
+        <p14:section name="도입" id="{6a0c9666-9def-e37f-03d7-976387cdb7d9}">
           <p14:sldIdLst>
             <p14:sldId id="256"/>
             <p14:sldId id="257"/>
           </p14:sldIdLst>
         </p14:section>
-        <p14:section name="개념" id="{c20c1b98-bd3f-ba04-3f9f-99bc0429722b}">
+        <p14:section name="개념" id="{98b85d9e-ebd9-9628-aa32-b3fc5a0687f0}">
           <p14:sldIdLst>
             <p14:sldId id="258"/>
             <p14:sldId id="259"/>
@@ -135,31 +135,31 @@
             <p14:sldId id="264"/>
           </p14:sldIdLst>
         </p14:section>
-        <p14:section name="연습" id="{de400e61-2ad7-4fde-6726-84b95a1cf22a}">
+        <p14:section name="연습" id="{39489d14-6a17-671a-ab90-a770b858e800}">
           <p14:sldIdLst>
             <p14:sldId id="262"/>
             <p14:sldId id="263"/>
             <p14:sldId id="265"/>
           </p14:sldIdLst>
         </p14:section>
-        <p14:section name="개념" id="{93925de8-e400-e989-91ac-5e686d68a6fd}">
+        <p14:section name="개념" id="{6b4e4fac-e700-adda-1e35-59fa2f3a140e}">
           <p14:sldIdLst/>
         </p14:section>
-        <p14:section name="연습" id="{4837c1e5-f452-fc01-98c1-f654395a80f4}">
+        <p14:section name="연습" id="{bf4d71b7-9e49-41b3-6f5b-a7efedc6a946}">
           <p14:sldIdLst/>
         </p14:section>
-        <p14:section name="확인" id="{1a8c1dae-f508-578a-f198-ce2929c52758}">
+        <p14:section name="확인" id="{f3d0196a-6a3f-61cb-fbef-a5b988ecbf7e}">
           <p14:sldIdLst>
             <p14:sldId id="266"/>
             <p14:sldId id="267"/>
           </p14:sldIdLst>
         </p14:section>
-        <p14:section name="정리" id="{26c827e2-addb-2eaa-fab7-1a62aa35808e}">
+        <p14:section name="정리" id="{d627764a-88bb-fdbb-63b8-1f8fee9981c0}">
           <p14:sldIdLst>
             <p14:sldId id="268"/>
           </p14:sldIdLst>
         </p14:section>
-        <p14:section name="보충" id="{8b81da1a-8494-f747-4aa2-a2f8ab82d5eb}">
+        <p14:section name="보충" id="{7079cfab-256a-634d-e1be-2d0943761497}">
           <p14:sldIdLst>
             <p14:sldId id="269"/>
           </p14:sldIdLst>

--- a/dist/초3/수학/자연수계산/초3_수학_자연수계산_03_나눗셈의뜻_학생용.pptx
+++ b/dist/초3/수학/자연수계산/초3_수학_자연수계산_03_나눗셈의뜻_학생용.pptx
@@ -120,13 +120,13 @@
   <p:extLst>
     <p:ext uri="{521415D9-36F7-43E2-AB2F-B90AF26B5E84}">
       <p14:sectionLst xmlns:p14="http://schemas.microsoft.com/office/powerpoint/2010/main">
-        <p14:section name="도입" id="{6a0c9666-9def-e37f-03d7-976387cdb7d9}">
+        <p14:section name="도입" id="{bc35c041-8af4-c484-d651-f2debdf02f7c}">
           <p14:sldIdLst>
             <p14:sldId id="256"/>
             <p14:sldId id="257"/>
           </p14:sldIdLst>
         </p14:section>
-        <p14:section name="개념" id="{98b85d9e-ebd9-9628-aa32-b3fc5a0687f0}">
+        <p14:section name="개념" id="{9f305ec1-679e-aa03-fdb3-37832e08fc38}">
           <p14:sldIdLst>
             <p14:sldId id="258"/>
             <p14:sldId id="259"/>
@@ -135,31 +135,31 @@
             <p14:sldId id="264"/>
           </p14:sldIdLst>
         </p14:section>
-        <p14:section name="연습" id="{39489d14-6a17-671a-ab90-a770b858e800}">
+        <p14:section name="연습" id="{ff61872e-9e28-7b23-eec0-379b65f97c88}">
           <p14:sldIdLst>
             <p14:sldId id="262"/>
             <p14:sldId id="263"/>
             <p14:sldId id="265"/>
           </p14:sldIdLst>
         </p14:section>
-        <p14:section name="개념" id="{6b4e4fac-e700-adda-1e35-59fa2f3a140e}">
+        <p14:section name="개념" id="{e3191d6d-2f3e-3658-9186-b997f9abfd7d}">
           <p14:sldIdLst/>
         </p14:section>
-        <p14:section name="연습" id="{bf4d71b7-9e49-41b3-6f5b-a7efedc6a946}">
+        <p14:section name="연습" id="{b8bf3fe4-e0a5-c47b-8da4-d02d4137e624}">
           <p14:sldIdLst/>
         </p14:section>
-        <p14:section name="확인" id="{f3d0196a-6a3f-61cb-fbef-a5b988ecbf7e}">
+        <p14:section name="확인" id="{57e580d3-33ad-7e9a-2b23-cdfb8df24580}">
           <p14:sldIdLst>
             <p14:sldId id="266"/>
             <p14:sldId id="267"/>
           </p14:sldIdLst>
         </p14:section>
-        <p14:section name="정리" id="{d627764a-88bb-fdbb-63b8-1f8fee9981c0}">
+        <p14:section name="정리" id="{a067736f-1704-97a0-27fa-c5fbc7194fc3}">
           <p14:sldIdLst>
             <p14:sldId id="268"/>
           </p14:sldIdLst>
         </p14:section>
-        <p14:section name="보충" id="{7079cfab-256a-634d-e1be-2d0943761497}">
+        <p14:section name="보충" id="{4e2d8551-9980-3c7c-ea29-9183f6ce52e8}">
           <p14:sldIdLst>
             <p14:sldId id="269"/>
           </p14:sldIdLst>
